--- a/misc/presentation/pinnacle_points_presentation.pptx
+++ b/misc/presentation/pinnacle_points_presentation.pptx
@@ -845,7 +845,7 @@
         </p:nvSpPr>
         <p:spPr>
           <a:xfrm>
-            <a:off x="381300" y="685800"/>
+            <a:off x="381000" y="685800"/>
             <a:ext cx="6096000" cy="3429000"/>
           </a:xfrm>
           <a:custGeom>
@@ -7009,9 +7009,13 @@
             </a:pPr>
             <a:r>
               <a:rPr lang="en"/>
-              <a:t>1553 pinnacle points were identified. An interactive map was shared online:</a:t>
+              <a:t>1554 pinnacle points were identified. </a:t>
             </a:r>
-            <a:endParaRPr/>
+            <a:r>
+              <a:rPr lang="en" dirty="0"/>
+              <a:t>An interactive map was shared online:</a:t>
+            </a:r>
+            <a:endParaRPr dirty="0"/>
           </a:p>
           <a:p>
             <a:pPr marL="457200" lvl="0" indent="-342900" algn="l" rtl="0">
@@ -7025,10 +7029,14 @@
               <a:buAutoNum type="arabicPeriod"/>
             </a:pPr>
             <a:r>
-              <a:rPr lang="en"/>
-              <a:t>prominence@groups.io on Email</a:t>
+              <a:rPr lang="en" dirty="0" err="1"/>
+              <a:t>prominence@groups.io</a:t>
             </a:r>
-            <a:endParaRPr/>
+            <a:r>
+              <a:rPr lang="en" dirty="0"/>
+              <a:t> on Email</a:t>
+            </a:r>
+            <a:endParaRPr dirty="0"/>
           </a:p>
           <a:p>
             <a:pPr marL="914400" lvl="1" indent="-317500" algn="l" rtl="0">
@@ -7042,10 +7050,10 @@
               <a:buChar char="○"/>
             </a:pPr>
             <a:r>
-              <a:rPr lang="en"/>
+              <a:rPr lang="en" dirty="0"/>
               <a:t>Mountain metric specialists</a:t>
             </a:r>
-            <a:endParaRPr/>
+            <a:endParaRPr dirty="0"/>
           </a:p>
           <a:p>
             <a:pPr marL="914400" lvl="1" indent="-317500" algn="l" rtl="0">
@@ -7059,10 +7067,10 @@
               <a:buChar char="○"/>
             </a:pPr>
             <a:r>
-              <a:rPr lang="en"/>
+              <a:rPr lang="en" dirty="0"/>
               <a:t>World-record-holding mountaineers</a:t>
             </a:r>
-            <a:endParaRPr/>
+            <a:endParaRPr dirty="0"/>
           </a:p>
           <a:p>
             <a:pPr marL="457200" lvl="0" indent="-342900" algn="l" rtl="0">
@@ -7076,10 +7084,10 @@
               <a:buAutoNum type="arabicPeriod"/>
             </a:pPr>
             <a:r>
-              <a:rPr lang="en"/>
+              <a:rPr lang="en" dirty="0"/>
               <a:t>r/mountaineering on Reddit</a:t>
             </a:r>
-            <a:endParaRPr/>
+            <a:endParaRPr dirty="0"/>
           </a:p>
           <a:p>
             <a:pPr marL="914400" lvl="1" indent="-317500" algn="l" rtl="0">
@@ -7093,10 +7101,10 @@
               <a:buChar char="○"/>
             </a:pPr>
             <a:r>
-              <a:rPr lang="en"/>
+              <a:rPr lang="en" dirty="0"/>
               <a:t>Mountaineering enthusiasts</a:t>
             </a:r>
-            <a:endParaRPr/>
+            <a:endParaRPr dirty="0"/>
           </a:p>
           <a:p>
             <a:pPr marL="0" lvl="0" indent="0" algn="l" rtl="0">
@@ -7109,17 +7117,17 @@
               <a:buNone/>
             </a:pPr>
             <a:r>
-              <a:rPr lang="en"/>
+              <a:rPr lang="en" dirty="0"/>
               <a:t>The 4 confirmed errors discovered so far are the </a:t>
             </a:r>
             <a:br>
-              <a:rPr lang="en"/>
+              <a:rPr lang="en" dirty="0"/>
             </a:br>
             <a:r>
-              <a:rPr lang="en"/>
+              <a:rPr lang="en" dirty="0"/>
               <a:t>result of inaccuracies in elevation data.</a:t>
             </a:r>
-            <a:endParaRPr/>
+            <a:endParaRPr dirty="0"/>
           </a:p>
         </p:txBody>
       </p:sp>
